--- a/docs/Interchange_AI_PhD_Presentation.pptx
+++ b/docs/Interchange_AI_PhD_Presentation.pptx
@@ -362,339 +362,6 @@
             </c:ext>
           </c:extLst>
         </c:ser>
-        <c:ser>
-          <c:idx val="2"/>
-          <c:order val="2"/>
-          <c:tx>
-            <c:strRef>
-              <c:f>Sheet1!$D$1</c:f>
-              <c:strCache>
-                <c:ptCount val="1"/>
-                <c:pt idx="0">
-                  <c:v>Amex</c:v>
-                </c:pt>
-              </c:strCache>
-            </c:strRef>
-          </c:tx>
-          <c:spPr>
-            <a:solidFill>
-              <a:srgbClr val="006FCF"/>
-            </a:solidFill>
-            <a:effectLst/>
-          </c:spPr>
-          <c:invertIfNegative val="0"/>
-          <c:dLbls>
-            <c:numFmt formatCode="#,##0" sourceLinked="0"/>
-            <c:spPr>
-              <a:noFill/>
-              <a:ln>
-                <a:noFill/>
-              </a:ln>
-              <a:effectLst/>
-            </c:spPr>
-            <c:txPr>
-              <a:bodyPr/>
-              <a:lstStyle/>
-              <a:p>
-                <a:pPr>
-                  <a:defRPr sz="800" b="0" i="0" u="none" strike="noStrike">
-                    <a:solidFill>
-                      <a:srgbClr val="1E293B"/>
-                    </a:solidFill>
-                    <a:latin typeface="Arial"/>
-                  </a:defRPr>
-                </a:pPr>
-                <a:endParaRPr lang="pt-BR"/>
-              </a:p>
-            </c:txPr>
-            <c:showLegendKey val="0"/>
-            <c:showVal val="1"/>
-            <c:showCatName val="0"/>
-            <c:showSerName val="0"/>
-            <c:showPercent val="0"/>
-            <c:showBubbleSize val="0"/>
-            <c:showLeaderLines val="0"/>
-            <c:extLst>
-              <c:ext xmlns:c15="http://schemas.microsoft.com/office/drawing/2012/chart" uri="{CE6537A1-D6FC-4f65-9D91-7224C49458BB}">
-                <c15:showLeaderLines val="0"/>
-              </c:ext>
-            </c:extLst>
-          </c:dLbls>
-          <c:cat>
-            <c:strRef>
-              <c:f>Sheet1!$A$2:$A$6</c:f>
-              <c:strCache>
-                <c:ptCount val="5"/>
-                <c:pt idx="0">
-                  <c:v>Classic</c:v>
-                </c:pt>
-                <c:pt idx="1">
-                  <c:v>Gold</c:v>
-                </c:pt>
-                <c:pt idx="2">
-                  <c:v>Platinum</c:v>
-                </c:pt>
-                <c:pt idx="3">
-                  <c:v>Signature</c:v>
-                </c:pt>
-                <c:pt idx="4">
-                  <c:v>Infinite</c:v>
-                </c:pt>
-              </c:strCache>
-            </c:strRef>
-          </c:cat>
-          <c:val>
-            <c:numRef>
-              <c:f>Sheet1!$D$2:$D$6</c:f>
-              <c:numCache>
-                <c:formatCode>General</c:formatCode>
-                <c:ptCount val="5"/>
-                <c:pt idx="0">
-                  <c:v>1.58</c:v>
-                </c:pt>
-                <c:pt idx="1">
-                  <c:v>1.72</c:v>
-                </c:pt>
-                <c:pt idx="2">
-                  <c:v>2.1</c:v>
-                </c:pt>
-                <c:pt idx="3">
-                  <c:v>0</c:v>
-                </c:pt>
-                <c:pt idx="4">
-                  <c:v>2.4500000000000002</c:v>
-                </c:pt>
-              </c:numCache>
-            </c:numRef>
-          </c:val>
-          <c:extLst>
-            <c:ext xmlns:c16="http://schemas.microsoft.com/office/drawing/2014/chart" uri="{C3380CC4-5D6E-409C-BE32-E72D297353CC}">
-              <c16:uniqueId val="{00000002-A764-48E1-B261-72ACE9BC9578}"/>
-            </c:ext>
-          </c:extLst>
-        </c:ser>
-        <c:ser>
-          <c:idx val="3"/>
-          <c:order val="3"/>
-          <c:tx>
-            <c:strRef>
-              <c:f>Sheet1!$E$1</c:f>
-              <c:strCache>
-                <c:ptCount val="1"/>
-                <c:pt idx="0">
-                  <c:v>Elo</c:v>
-                </c:pt>
-              </c:strCache>
-            </c:strRef>
-          </c:tx>
-          <c:spPr>
-            <a:solidFill>
-              <a:srgbClr val="B8860B"/>
-            </a:solidFill>
-            <a:effectLst/>
-          </c:spPr>
-          <c:invertIfNegative val="0"/>
-          <c:dLbls>
-            <c:numFmt formatCode="#,##0" sourceLinked="0"/>
-            <c:spPr>
-              <a:noFill/>
-              <a:ln>
-                <a:noFill/>
-              </a:ln>
-              <a:effectLst/>
-            </c:spPr>
-            <c:txPr>
-              <a:bodyPr/>
-              <a:lstStyle/>
-              <a:p>
-                <a:pPr>
-                  <a:defRPr sz="800" b="0" i="0" u="none" strike="noStrike">
-                    <a:solidFill>
-                      <a:srgbClr val="1E293B"/>
-                    </a:solidFill>
-                    <a:latin typeface="Arial"/>
-                  </a:defRPr>
-                </a:pPr>
-                <a:endParaRPr lang="pt-BR"/>
-              </a:p>
-            </c:txPr>
-            <c:showLegendKey val="0"/>
-            <c:showVal val="1"/>
-            <c:showCatName val="0"/>
-            <c:showSerName val="0"/>
-            <c:showPercent val="0"/>
-            <c:showBubbleSize val="0"/>
-            <c:showLeaderLines val="0"/>
-            <c:extLst>
-              <c:ext xmlns:c15="http://schemas.microsoft.com/office/drawing/2012/chart" uri="{CE6537A1-D6FC-4f65-9D91-7224C49458BB}">
-                <c15:showLeaderLines val="0"/>
-              </c:ext>
-            </c:extLst>
-          </c:dLbls>
-          <c:cat>
-            <c:strRef>
-              <c:f>Sheet1!$A$2:$A$6</c:f>
-              <c:strCache>
-                <c:ptCount val="5"/>
-                <c:pt idx="0">
-                  <c:v>Classic</c:v>
-                </c:pt>
-                <c:pt idx="1">
-                  <c:v>Gold</c:v>
-                </c:pt>
-                <c:pt idx="2">
-                  <c:v>Platinum</c:v>
-                </c:pt>
-                <c:pt idx="3">
-                  <c:v>Signature</c:v>
-                </c:pt>
-                <c:pt idx="4">
-                  <c:v>Infinite</c:v>
-                </c:pt>
-              </c:strCache>
-            </c:strRef>
-          </c:cat>
-          <c:val>
-            <c:numRef>
-              <c:f>Sheet1!$E$2:$E$6</c:f>
-              <c:numCache>
-                <c:formatCode>General</c:formatCode>
-                <c:ptCount val="5"/>
-                <c:pt idx="0">
-                  <c:v>1.1499999999999999</c:v>
-                </c:pt>
-                <c:pt idx="1">
-                  <c:v>1.35</c:v>
-                </c:pt>
-                <c:pt idx="2">
-                  <c:v>1.62</c:v>
-                </c:pt>
-                <c:pt idx="3">
-                  <c:v>0</c:v>
-                </c:pt>
-                <c:pt idx="4">
-                  <c:v>1.78</c:v>
-                </c:pt>
-              </c:numCache>
-            </c:numRef>
-          </c:val>
-          <c:extLst>
-            <c:ext xmlns:c16="http://schemas.microsoft.com/office/drawing/2014/chart" uri="{C3380CC4-5D6E-409C-BE32-E72D297353CC}">
-              <c16:uniqueId val="{00000003-A764-48E1-B261-72ACE9BC9578}"/>
-            </c:ext>
-          </c:extLst>
-        </c:ser>
-        <c:ser>
-          <c:idx val="4"/>
-          <c:order val="4"/>
-          <c:tx>
-            <c:strRef>
-              <c:f>Sheet1!$F$1</c:f>
-              <c:strCache>
-                <c:ptCount val="1"/>
-                <c:pt idx="0">
-                  <c:v>Hipercard</c:v>
-                </c:pt>
-              </c:strCache>
-            </c:strRef>
-          </c:tx>
-          <c:spPr>
-            <a:solidFill>
-              <a:srgbClr val="8B1A1A"/>
-            </a:solidFill>
-            <a:effectLst/>
-          </c:spPr>
-          <c:invertIfNegative val="0"/>
-          <c:dLbls>
-            <c:numFmt formatCode="#,##0" sourceLinked="0"/>
-            <c:spPr>
-              <a:noFill/>
-              <a:ln>
-                <a:noFill/>
-              </a:ln>
-              <a:effectLst/>
-            </c:spPr>
-            <c:txPr>
-              <a:bodyPr/>
-              <a:lstStyle/>
-              <a:p>
-                <a:pPr>
-                  <a:defRPr sz="800" b="0" i="0" u="none" strike="noStrike">
-                    <a:solidFill>
-                      <a:srgbClr val="1E293B"/>
-                    </a:solidFill>
-                    <a:latin typeface="Arial"/>
-                  </a:defRPr>
-                </a:pPr>
-                <a:endParaRPr lang="pt-BR"/>
-              </a:p>
-            </c:txPr>
-            <c:showLegendKey val="0"/>
-            <c:showVal val="1"/>
-            <c:showCatName val="0"/>
-            <c:showSerName val="0"/>
-            <c:showPercent val="0"/>
-            <c:showBubbleSize val="0"/>
-            <c:showLeaderLines val="0"/>
-            <c:extLst>
-              <c:ext xmlns:c15="http://schemas.microsoft.com/office/drawing/2012/chart" uri="{CE6537A1-D6FC-4f65-9D91-7224C49458BB}">
-                <c15:showLeaderLines val="0"/>
-              </c:ext>
-            </c:extLst>
-          </c:dLbls>
-          <c:cat>
-            <c:strRef>
-              <c:f>Sheet1!$A$2:$A$6</c:f>
-              <c:strCache>
-                <c:ptCount val="5"/>
-                <c:pt idx="0">
-                  <c:v>Classic</c:v>
-                </c:pt>
-                <c:pt idx="1">
-                  <c:v>Gold</c:v>
-                </c:pt>
-                <c:pt idx="2">
-                  <c:v>Platinum</c:v>
-                </c:pt>
-                <c:pt idx="3">
-                  <c:v>Signature</c:v>
-                </c:pt>
-                <c:pt idx="4">
-                  <c:v>Infinite</c:v>
-                </c:pt>
-              </c:strCache>
-            </c:strRef>
-          </c:cat>
-          <c:val>
-            <c:numRef>
-              <c:f>Sheet1!$F$2:$F$6</c:f>
-              <c:numCache>
-                <c:formatCode>General</c:formatCode>
-                <c:ptCount val="5"/>
-                <c:pt idx="0">
-                  <c:v>1.25</c:v>
-                </c:pt>
-                <c:pt idx="1">
-                  <c:v>0</c:v>
-                </c:pt>
-                <c:pt idx="2">
-                  <c:v>1.45</c:v>
-                </c:pt>
-                <c:pt idx="3">
-                  <c:v>0</c:v>
-                </c:pt>
-                <c:pt idx="4">
-                  <c:v>0</c:v>
-                </c:pt>
-              </c:numCache>
-            </c:numRef>
-          </c:val>
-          <c:extLst>
-            <c:ext xmlns:c16="http://schemas.microsoft.com/office/drawing/2014/chart" uri="{C3380CC4-5D6E-409C-BE32-E72D297353CC}">
-              <c16:uniqueId val="{00000004-A764-48E1-B261-72ACE9BC9578}"/>
-            </c:ext>
-          </c:extLst>
-        </c:ser>
         <c:dLbls>
           <c:showLegendKey val="0"/>
           <c:showVal val="1"/>
@@ -3561,7 +3228,23 @@
                   <a:srgbClr val="1E293B"/>
                 </a:solidFill>
               </a:rPr>
-              <a:t>Taxas base Visa, MC, Amex, Elo, Hipercard — 140 regras</a:t>
+              <a:t>Taxas base Visa, MC (outros: Amex, Elo, </a:t>
+            </a:r>
+            <a:r>
+              <a:rPr lang="en-US" sz="950" dirty="0" err="1">
+                <a:solidFill>
+                  <a:srgbClr val="1E293B"/>
+                </a:solidFill>
+              </a:rPr>
+              <a:t>Hipercard</a:t>
+            </a:r>
+            <a:r>
+              <a:rPr lang="en-US" sz="950" dirty="0">
+                <a:solidFill>
+                  <a:srgbClr val="1E293B"/>
+                </a:solidFill>
+              </a:rPr>
+              <a:t>)</a:t>
             </a:r>
             <a:endParaRPr lang="en-US" sz="950" dirty="0"/>
           </a:p>
@@ -5542,7 +5225,23 @@
                   <a:srgbClr val="1E293B"/>
                 </a:solidFill>
               </a:rPr>
-              <a:t>~40% dos documentos históricos são imagens digitalizadas. pytesseract tem ~15% taxa de erro em tabelas financeiras densas. Solução: pipeline OCR com pré-processamento de imagem (deskew, binarização, denoising).</a:t>
+              <a:t>~40% dos documentos históricos são imagens digitalizadas. pytesseract tem ~15% taxa de erro em tabelas financeiras densas. Solução: pipeline OCR com pré-processamento de imagem (deskew, binarização, denoising) (</a:t>
+            </a:r>
+            <a:r>
+              <a:rPr lang="en-US" sz="900" dirty="0" err="1">
+                <a:solidFill>
+                  <a:srgbClr val="1E293B"/>
+                </a:solidFill>
+              </a:rPr>
+              <a:t>Docling</a:t>
+            </a:r>
+            <a:r>
+              <a:rPr lang="en-US" sz="900" dirty="0">
+                <a:solidFill>
+                  <a:srgbClr val="1E293B"/>
+                </a:solidFill>
+              </a:rPr>
+              <a:t>)</a:t>
             </a:r>
             <a:endParaRPr lang="en-US" sz="900" dirty="0"/>
           </a:p>
@@ -6250,7 +5949,71 @@
                   <a:srgbClr val="1E293B"/>
                 </a:solidFill>
               </a:rPr>
-              <a:t>Sem diff semântico, impossível detectar qual regra mudou sem reprocessar tudo. Solução proposta: embedding vetorial + similaridade coseno para detecção incremental de mudanças.</a:t>
+              <a:t>Sem diff semântico, impossível detectar qual regra mudou sem reprocessar tudo. Solução proposta: embedding vetorial + </a:t>
+            </a:r>
+            <a:r>
+              <a:rPr lang="en-US" sz="900" dirty="0" err="1">
+                <a:solidFill>
+                  <a:srgbClr val="1E293B"/>
+                </a:solidFill>
+              </a:rPr>
+              <a:t>similaridade</a:t>
+            </a:r>
+            <a:r>
+              <a:rPr lang="en-US" sz="900" dirty="0">
+                <a:solidFill>
+                  <a:srgbClr val="1E293B"/>
+                </a:solidFill>
+              </a:rPr>
+              <a:t> para detecção incremental de </a:t>
+            </a:r>
+            <a:r>
+              <a:rPr lang="en-US" sz="900" dirty="0" err="1">
+                <a:solidFill>
+                  <a:srgbClr val="1E293B"/>
+                </a:solidFill>
+              </a:rPr>
+              <a:t>mudanças</a:t>
+            </a:r>
+            <a:r>
+              <a:rPr lang="en-US" sz="900" dirty="0">
+                <a:solidFill>
+                  <a:srgbClr val="1E293B"/>
+                </a:solidFill>
+              </a:rPr>
+              <a:t> (</a:t>
+            </a:r>
+            <a:r>
+              <a:rPr lang="en-US" sz="900" dirty="0" err="1">
+                <a:solidFill>
+                  <a:srgbClr val="1E293B"/>
+                </a:solidFill>
+              </a:rPr>
+              <a:t>investigar</a:t>
+            </a:r>
+            <a:r>
+              <a:rPr lang="en-US" sz="900" dirty="0">
+                <a:solidFill>
+                  <a:srgbClr val="1E293B"/>
+                </a:solidFill>
+              </a:rPr>
+              <a:t> LLM </a:t>
+            </a:r>
+            <a:r>
+              <a:rPr lang="en-US" sz="900" dirty="0" err="1">
+                <a:solidFill>
+                  <a:srgbClr val="1E293B"/>
+                </a:solidFill>
+              </a:rPr>
+              <a:t>recursivo</a:t>
+            </a:r>
+            <a:r>
+              <a:rPr lang="en-US" sz="900" dirty="0">
+                <a:solidFill>
+                  <a:srgbClr val="1E293B"/>
+                </a:solidFill>
+              </a:rPr>
+              <a:t>)</a:t>
             </a:r>
             <a:endParaRPr lang="en-US" sz="900" dirty="0"/>
           </a:p>
@@ -9087,7 +8850,7 @@
                   <a:srgbClr val="FFFFFF"/>
                 </a:solidFill>
               </a:rPr>
-              <a:t>ROADMAP DOCTORAL — DO PIPELINE AO AGENTE DE IA AUTÔNOMO</a:t>
+              <a:t>ROADMAP — DO PIPELINE AO AGENTE DE IA AUTÔNOMO</a:t>
             </a:r>
             <a:endParaRPr lang="en-US" sz="1900" dirty="0"/>
           </a:p>
@@ -9313,12 +9076,36 @@
               <a:buNone/>
             </a:pPr>
             <a:r>
+              <a:rPr lang="en-US" sz="950" dirty="0" err="1">
+                <a:solidFill>
+                  <a:srgbClr val="CADCFC"/>
+                </a:solidFill>
+              </a:rPr>
+              <a:t>Regras</a:t>
+            </a:r>
+            <a:r>
               <a:rPr lang="en-US" sz="950" dirty="0">
                 <a:solidFill>
                   <a:srgbClr val="CADCFC"/>
                 </a:solidFill>
               </a:rPr>
-              <a:t>140 regras: Visa, MC, Amex, Elo, Hipercard, BCB</a:t>
+              <a:t>: Visa, MC (opcional: Amex, Elo, </a:t>
+            </a:r>
+            <a:r>
+              <a:rPr lang="en-US" sz="950" dirty="0" err="1">
+                <a:solidFill>
+                  <a:srgbClr val="CADCFC"/>
+                </a:solidFill>
+              </a:rPr>
+              <a:t>Hipercard</a:t>
+            </a:r>
+            <a:r>
+              <a:rPr lang="en-US" sz="950" dirty="0">
+                <a:solidFill>
+                  <a:srgbClr val="CADCFC"/>
+                </a:solidFill>
+              </a:rPr>
+              <a:t>), BCB</a:t>
             </a:r>
             <a:endParaRPr lang="en-US" sz="950" dirty="0"/>
           </a:p>
@@ -9374,7 +9161,23 @@
                   <a:srgbClr val="CADCFC"/>
                 </a:solidFill>
               </a:rPr>
-              <a:t>API REST + Dashboard Streamlit + Airflow</a:t>
+              <a:t>API REST + Dashboard Next.JS/</a:t>
+            </a:r>
+            <a:r>
+              <a:rPr lang="en-US" sz="950" dirty="0" err="1">
+                <a:solidFill>
+                  <a:srgbClr val="CADCFC"/>
+                </a:solidFill>
+              </a:rPr>
+              <a:t>Streamlit</a:t>
+            </a:r>
+            <a:r>
+              <a:rPr lang="en-US" sz="950" dirty="0">
+                <a:solidFill>
+                  <a:srgbClr val="CADCFC"/>
+                </a:solidFill>
+              </a:rPr>
+              <a:t> + Airflow</a:t>
             </a:r>
             <a:endParaRPr lang="en-US" sz="950" dirty="0"/>
           </a:p>
@@ -9430,7 +9233,7 @@
                   <a:srgbClr val="CADCFC"/>
                 </a:solidFill>
               </a:rPr>
-              <a:t>115 testes automatizados (100% pass rate)</a:t>
+              <a:t>Testes automatizados (100% pass rate)</a:t>
             </a:r>
             <a:endParaRPr lang="en-US" sz="950" dirty="0"/>
           </a:p>
@@ -9661,7 +9464,39 @@
                   <a:srgbClr val="CADCFC"/>
                 </a:solidFill>
               </a:rPr>
-              <a:t>OCR (pytesseract) para PDFs escaneados</a:t>
+              <a:t>OCR (</a:t>
+            </a:r>
+            <a:r>
+              <a:rPr lang="en-US" sz="950" dirty="0" err="1">
+                <a:solidFill>
+                  <a:srgbClr val="CADCFC"/>
+                </a:solidFill>
+              </a:rPr>
+              <a:t>pytesseract</a:t>
+            </a:r>
+            <a:r>
+              <a:rPr lang="en-US" sz="950" dirty="0">
+                <a:solidFill>
+                  <a:srgbClr val="CADCFC"/>
+                </a:solidFill>
+              </a:rPr>
+              <a:t>, </a:t>
+            </a:r>
+            <a:r>
+              <a:rPr lang="en-US" sz="950" dirty="0" err="1">
+                <a:solidFill>
+                  <a:srgbClr val="CADCFC"/>
+                </a:solidFill>
+              </a:rPr>
+              <a:t>Docling</a:t>
+            </a:r>
+            <a:r>
+              <a:rPr lang="en-US" sz="950" dirty="0">
+                <a:solidFill>
+                  <a:srgbClr val="CADCFC"/>
+                </a:solidFill>
+              </a:rPr>
+              <a:t>) para PDFs escaneados</a:t>
             </a:r>
             <a:endParaRPr lang="en-US" sz="950" dirty="0"/>
           </a:p>
@@ -10298,7 +10133,7 @@
         </p:nvSpPr>
         <p:spPr>
           <a:xfrm>
-            <a:off x="292608" y="4956048"/>
+            <a:off x="292608" y="4687824"/>
             <a:ext cx="8558784" cy="457200"/>
           </a:xfrm>
           <a:prstGeom prst="rect">
@@ -10325,7 +10160,7 @@
         </p:nvSpPr>
         <p:spPr>
           <a:xfrm>
-            <a:off x="402336" y="4992624"/>
+            <a:off x="384048" y="4705604"/>
             <a:ext cx="8321040" cy="347472"/>
           </a:xfrm>
           <a:prstGeom prst="rect">
@@ -11097,12 +10932,20 @@
               <a:buNone/>
             </a:pPr>
             <a:r>
+              <a:rPr lang="en-US" sz="1200" dirty="0" err="1">
+                <a:solidFill>
+                  <a:srgbClr val="0D9488"/>
+                </a:solidFill>
+              </a:rPr>
+              <a:t>Contribuição</a:t>
+            </a:r>
+            <a:r>
               <a:rPr lang="en-US" sz="1200" dirty="0">
                 <a:solidFill>
                   <a:srgbClr val="0D9488"/>
                 </a:solidFill>
               </a:rPr>
-              <a:t>Contribuição Doctoral: framework HITL BCB-aware para extração de regras tarifárias.</a:t>
+              <a:t>: framework HITL BCB-aware para extração de regras tarifárias.</a:t>
             </a:r>
             <a:endParaRPr lang="en-US" sz="1200" dirty="0"/>
           </a:p>
@@ -11138,7 +10981,7 @@
                   <a:srgbClr val="FFFFFF"/>
                 </a:solidFill>
               </a:rPr>
-              <a:t>Interchange AI v2.0  ·  Roberto Júnior — NCDD / 2026</a:t>
+              <a:t>Interchange AI  ·  NIELSEN CASTELO DAMASCENO DANTAS 2026</a:t>
             </a:r>
             <a:endParaRPr lang="en-US" sz="1050" dirty="0"/>
           </a:p>
@@ -11230,7 +11073,7 @@
                 <a:ea typeface="Calibri" pitchFamily="34" charset="-122"/>
                 <a:cs typeface="Calibri" pitchFamily="34" charset="-120"/>
               </a:rPr>
-              <a:t>AGENDA — ESTRUTURA DA APRESENTAÇÃO</a:t>
+              <a:t>AGENDA</a:t>
             </a:r>
             <a:endParaRPr lang="en-US" sz="2100" dirty="0"/>
           </a:p>
@@ -14093,20 +13936,20 @@
       </p:sp>
       <p:sp>
         <p:nvSpPr>
-          <p:cNvPr id="19" name="Shape 17"/>
-          <p:cNvSpPr/>
-          <p:nvPr/>
-        </p:nvSpPr>
-        <p:spPr>
-          <a:xfrm>
-            <a:off x="320040" y="2798064"/>
+          <p:cNvPr id="37" name="Shape 35"/>
+          <p:cNvSpPr/>
+          <p:nvPr/>
+        </p:nvSpPr>
+        <p:spPr>
+          <a:xfrm>
+            <a:off x="320040" y="2833878"/>
             <a:ext cx="8503920" cy="457200"/>
           </a:xfrm>
           <a:prstGeom prst="rect">
             <a:avLst/>
           </a:prstGeom>
           <a:solidFill>
-            <a:srgbClr val="FFFFFF"/>
+            <a:srgbClr val="EEF4FF"/>
           </a:solidFill>
           <a:ln/>
           <a:effectLst>
@@ -14120,586 +13963,13 @@
       </p:sp>
       <p:sp>
         <p:nvSpPr>
-          <p:cNvPr id="20" name="Shape 18"/>
-          <p:cNvSpPr/>
-          <p:nvPr/>
-        </p:nvSpPr>
-        <p:spPr>
-          <a:xfrm>
-            <a:off x="320040" y="2798064"/>
-            <a:ext cx="960120" cy="457200"/>
-          </a:xfrm>
-          <a:prstGeom prst="rect">
-            <a:avLst/>
-          </a:prstGeom>
-          <a:solidFill>
-            <a:srgbClr val="006FCF"/>
-          </a:solidFill>
-          <a:ln/>
-        </p:spPr>
-      </p:sp>
-      <p:sp>
-        <p:nvSpPr>
-          <p:cNvPr id="21" name="Text 19"/>
-          <p:cNvSpPr/>
-          <p:nvPr/>
-        </p:nvSpPr>
-        <p:spPr>
-          <a:xfrm>
-            <a:off x="320040" y="2798064"/>
-            <a:ext cx="960120" cy="457200"/>
-          </a:xfrm>
-          <a:prstGeom prst="rect">
-            <a:avLst/>
-          </a:prstGeom>
-          <a:noFill/>
-          <a:ln/>
-        </p:spPr>
-        <p:txBody>
-          <a:bodyPr wrap="square" lIns="0" tIns="0" rIns="0" bIns="0" rtlCol="0" anchor="ctr"/>
-          <a:lstStyle/>
-          <a:p>
-            <a:pPr marL="0" indent="0" algn="ctr">
-              <a:buNone/>
-            </a:pPr>
-            <a:r>
-              <a:rPr lang="en-US" sz="900" b="1" dirty="0">
-                <a:solidFill>
-                  <a:srgbClr val="FFFFFF"/>
-                </a:solidFill>
-              </a:rPr>
-              <a:t>AMEX</a:t>
-            </a:r>
-            <a:endParaRPr lang="en-US" sz="900" dirty="0"/>
-          </a:p>
-        </p:txBody>
-      </p:sp>
-      <p:sp>
-        <p:nvSpPr>
-          <p:cNvPr id="22" name="Text 20"/>
-          <p:cNvSpPr/>
-          <p:nvPr/>
-        </p:nvSpPr>
-        <p:spPr>
-          <a:xfrm>
-            <a:off x="1353312" y="2825496"/>
-            <a:ext cx="3017520" cy="182880"/>
-          </a:xfrm>
-          <a:prstGeom prst="rect">
-            <a:avLst/>
-          </a:prstGeom>
-          <a:noFill/>
-          <a:ln/>
-        </p:spPr>
-        <p:txBody>
-          <a:bodyPr wrap="square" lIns="0" tIns="0" rIns="0" bIns="0" rtlCol="0" anchor="ctr"/>
-          <a:lstStyle/>
-          <a:p>
-            <a:pPr marL="0" indent="0">
-              <a:buNone/>
-            </a:pPr>
-            <a:r>
-              <a:rPr lang="en-US" sz="900" b="1" dirty="0">
-                <a:solidFill>
-                  <a:srgbClr val="0B1F4B"/>
-                </a:solidFill>
-              </a:rPr>
-              <a:t>amex_bcb_sample.txt</a:t>
-            </a:r>
-            <a:endParaRPr lang="en-US" sz="900" dirty="0"/>
-          </a:p>
-        </p:txBody>
-      </p:sp>
-      <p:sp>
-        <p:nvSpPr>
-          <p:cNvPr id="23" name="Text 21"/>
-          <p:cNvSpPr/>
-          <p:nvPr/>
-        </p:nvSpPr>
-        <p:spPr>
-          <a:xfrm>
-            <a:off x="1353312" y="3035808"/>
-            <a:ext cx="3017520" cy="182880"/>
-          </a:xfrm>
-          <a:prstGeom prst="rect">
-            <a:avLst/>
-          </a:prstGeom>
-          <a:noFill/>
-          <a:ln/>
-        </p:spPr>
-        <p:txBody>
-          <a:bodyPr wrap="square" lIns="0" tIns="0" rIns="0" bIns="0" rtlCol="0" anchor="ctr"/>
-          <a:lstStyle/>
-          <a:p>
-            <a:pPr marL="0" indent="0">
-              <a:buNone/>
-            </a:pPr>
-            <a:r>
-              <a:rPr lang="en-US" sz="800" dirty="0">
-                <a:solidFill>
-                  <a:srgbClr val="64748B"/>
-                </a:solidFill>
-              </a:rPr>
-              <a:t>Relatórios AmEx Bradesco/BB + CVM/B3 notas explicativas</a:t>
-            </a:r>
-            <a:endParaRPr lang="en-US" sz="800" dirty="0"/>
-          </a:p>
-        </p:txBody>
-      </p:sp>
-      <p:sp>
-        <p:nvSpPr>
-          <p:cNvPr id="24" name="Text 22"/>
-          <p:cNvSpPr/>
-          <p:nvPr/>
-        </p:nvSpPr>
-        <p:spPr>
-          <a:xfrm>
-            <a:off x="4462272" y="2898648"/>
-            <a:ext cx="4297680" cy="237744"/>
-          </a:xfrm>
-          <a:prstGeom prst="rect">
-            <a:avLst/>
-          </a:prstGeom>
-          <a:noFill/>
-          <a:ln/>
-        </p:spPr>
-        <p:txBody>
-          <a:bodyPr wrap="square" lIns="0" tIns="0" rIns="0" bIns="0" rtlCol="0" anchor="ctr"/>
-          <a:lstStyle/>
-          <a:p>
-            <a:pPr marL="0" indent="0">
-              <a:buNone/>
-            </a:pPr>
-            <a:r>
-              <a:rPr lang="en-US" sz="750" i="1" dirty="0">
-                <a:solidFill>
-                  <a:srgbClr val="1A56A0"/>
-                </a:solidFill>
-              </a:rPr>
-              <a:t>americanexpress.com/pt-br • cvm.gov.br (relatórios anuais)</a:t>
-            </a:r>
-            <a:endParaRPr lang="en-US" sz="750" dirty="0"/>
-          </a:p>
-        </p:txBody>
-      </p:sp>
-      <p:sp>
-        <p:nvSpPr>
-          <p:cNvPr id="25" name="Shape 23"/>
-          <p:cNvSpPr/>
-          <p:nvPr/>
-        </p:nvSpPr>
-        <p:spPr>
-          <a:xfrm>
-            <a:off x="320040" y="3319272"/>
-            <a:ext cx="8503920" cy="457200"/>
-          </a:xfrm>
-          <a:prstGeom prst="rect">
-            <a:avLst/>
-          </a:prstGeom>
-          <a:solidFill>
-            <a:srgbClr val="EEF4FF"/>
-          </a:solidFill>
-          <a:ln/>
-          <a:effectLst>
-            <a:outerShdw blurRad="101600" dist="38100" dir="8100000" algn="bl" rotWithShape="0">
-              <a:srgbClr val="000000">
-                <a:alpha val="10000"/>
-              </a:srgbClr>
-            </a:outerShdw>
-          </a:effectLst>
-        </p:spPr>
-      </p:sp>
-      <p:sp>
-        <p:nvSpPr>
-          <p:cNvPr id="26" name="Shape 24"/>
-          <p:cNvSpPr/>
-          <p:nvPr/>
-        </p:nvSpPr>
-        <p:spPr>
-          <a:xfrm>
-            <a:off x="320040" y="3319272"/>
-            <a:ext cx="960120" cy="457200"/>
-          </a:xfrm>
-          <a:prstGeom prst="rect">
-            <a:avLst/>
-          </a:prstGeom>
-          <a:solidFill>
-            <a:srgbClr val="B8860B"/>
-          </a:solidFill>
-          <a:ln/>
-        </p:spPr>
-      </p:sp>
-      <p:sp>
-        <p:nvSpPr>
-          <p:cNvPr id="27" name="Text 25"/>
-          <p:cNvSpPr/>
-          <p:nvPr/>
-        </p:nvSpPr>
-        <p:spPr>
-          <a:xfrm>
-            <a:off x="320040" y="3319272"/>
-            <a:ext cx="960120" cy="457200"/>
-          </a:xfrm>
-          <a:prstGeom prst="rect">
-            <a:avLst/>
-          </a:prstGeom>
-          <a:noFill/>
-          <a:ln/>
-        </p:spPr>
-        <p:txBody>
-          <a:bodyPr wrap="square" lIns="0" tIns="0" rIns="0" bIns="0" rtlCol="0" anchor="ctr"/>
-          <a:lstStyle/>
-          <a:p>
-            <a:pPr marL="0" indent="0" algn="ctr">
-              <a:buNone/>
-            </a:pPr>
-            <a:r>
-              <a:rPr lang="en-US" sz="900" b="1" dirty="0">
-                <a:solidFill>
-                  <a:srgbClr val="FFFFFF"/>
-                </a:solidFill>
-              </a:rPr>
-              <a:t>ELO</a:t>
-            </a:r>
-            <a:endParaRPr lang="en-US" sz="900" dirty="0"/>
-          </a:p>
-        </p:txBody>
-      </p:sp>
-      <p:sp>
-        <p:nvSpPr>
-          <p:cNvPr id="28" name="Text 26"/>
-          <p:cNvSpPr/>
-          <p:nvPr/>
-        </p:nvSpPr>
-        <p:spPr>
-          <a:xfrm>
-            <a:off x="1353312" y="3346704"/>
-            <a:ext cx="3017520" cy="182880"/>
-          </a:xfrm>
-          <a:prstGeom prst="rect">
-            <a:avLst/>
-          </a:prstGeom>
-          <a:noFill/>
-          <a:ln/>
-        </p:spPr>
-        <p:txBody>
-          <a:bodyPr wrap="square" lIns="0" tIns="0" rIns="0" bIns="0" rtlCol="0" anchor="ctr"/>
-          <a:lstStyle/>
-          <a:p>
-            <a:pPr marL="0" indent="0">
-              <a:buNone/>
-            </a:pPr>
-            <a:r>
-              <a:rPr lang="en-US" sz="900" b="1" dirty="0">
-                <a:solidFill>
-                  <a:srgbClr val="0B1F4B"/>
-                </a:solidFill>
-              </a:rPr>
-              <a:t>sample_interchange_rules.csv</a:t>
-            </a:r>
-            <a:endParaRPr lang="en-US" sz="900" dirty="0"/>
-          </a:p>
-        </p:txBody>
-      </p:sp>
-      <p:sp>
-        <p:nvSpPr>
-          <p:cNvPr id="29" name="Text 27"/>
-          <p:cNvSpPr/>
-          <p:nvPr/>
-        </p:nvSpPr>
-        <p:spPr>
-          <a:xfrm>
-            <a:off x="1353312" y="3557016"/>
-            <a:ext cx="3017520" cy="182880"/>
-          </a:xfrm>
-          <a:prstGeom prst="rect">
-            <a:avLst/>
-          </a:prstGeom>
-          <a:noFill/>
-          <a:ln/>
-        </p:spPr>
-        <p:txBody>
-          <a:bodyPr wrap="square" lIns="0" tIns="0" rIns="0" bIns="0" rtlCol="0" anchor="ctr"/>
-          <a:lstStyle/>
-          <a:p>
-            <a:pPr marL="0" indent="0">
-              <a:buNone/>
-            </a:pPr>
-            <a:r>
-              <a:rPr lang="en-US" sz="800" dirty="0">
-                <a:solidFill>
-                  <a:srgbClr val="64748B"/>
-                </a:solidFill>
-              </a:rPr>
-              <a:t>Elo Serviços S.A. — tabela pública 2024</a:t>
-            </a:r>
-            <a:endParaRPr lang="en-US" sz="800" dirty="0"/>
-          </a:p>
-        </p:txBody>
-      </p:sp>
-      <p:sp>
-        <p:nvSpPr>
-          <p:cNvPr id="30" name="Text 28"/>
-          <p:cNvSpPr/>
-          <p:nvPr/>
-        </p:nvSpPr>
-        <p:spPr>
-          <a:xfrm>
-            <a:off x="4462272" y="3419856"/>
-            <a:ext cx="4297680" cy="237744"/>
-          </a:xfrm>
-          <a:prstGeom prst="rect">
-            <a:avLst/>
-          </a:prstGeom>
-          <a:noFill/>
-          <a:ln/>
-        </p:spPr>
-        <p:txBody>
-          <a:bodyPr wrap="square" lIns="0" tIns="0" rIns="0" bIns="0" rtlCol="0" anchor="ctr"/>
-          <a:lstStyle/>
-          <a:p>
-            <a:pPr marL="0" indent="0">
-              <a:buNone/>
-            </a:pPr>
-            <a:r>
-              <a:rPr lang="en-US" sz="750" i="1" dirty="0">
-                <a:solidFill>
-                  <a:srgbClr val="1A56A0"/>
-                </a:solidFill>
-              </a:rPr>
-              <a:t>elocard.com.br/para-seu-negocio • BC Circular 3.886/2018</a:t>
-            </a:r>
-            <a:endParaRPr lang="en-US" sz="750" dirty="0"/>
-          </a:p>
-        </p:txBody>
-      </p:sp>
-      <p:sp>
-        <p:nvSpPr>
-          <p:cNvPr id="31" name="Shape 29"/>
-          <p:cNvSpPr/>
-          <p:nvPr/>
-        </p:nvSpPr>
-        <p:spPr>
-          <a:xfrm>
-            <a:off x="320040" y="3840480"/>
-            <a:ext cx="8503920" cy="457200"/>
-          </a:xfrm>
-          <a:prstGeom prst="rect">
-            <a:avLst/>
-          </a:prstGeom>
-          <a:solidFill>
-            <a:srgbClr val="FFFFFF"/>
-          </a:solidFill>
-          <a:ln/>
-          <a:effectLst>
-            <a:outerShdw blurRad="101600" dist="38100" dir="8100000" algn="bl" rotWithShape="0">
-              <a:srgbClr val="000000">
-                <a:alpha val="10000"/>
-              </a:srgbClr>
-            </a:outerShdw>
-          </a:effectLst>
-        </p:spPr>
-      </p:sp>
-      <p:sp>
-        <p:nvSpPr>
-          <p:cNvPr id="32" name="Shape 30"/>
-          <p:cNvSpPr/>
-          <p:nvPr/>
-        </p:nvSpPr>
-        <p:spPr>
-          <a:xfrm>
-            <a:off x="320040" y="3840480"/>
-            <a:ext cx="960120" cy="457200"/>
-          </a:xfrm>
-          <a:prstGeom prst="rect">
-            <a:avLst/>
-          </a:prstGeom>
-          <a:solidFill>
-            <a:srgbClr val="8B1A1A"/>
-          </a:solidFill>
-          <a:ln/>
-        </p:spPr>
-      </p:sp>
-      <p:sp>
-        <p:nvSpPr>
-          <p:cNvPr id="33" name="Text 31"/>
-          <p:cNvSpPr/>
-          <p:nvPr/>
-        </p:nvSpPr>
-        <p:spPr>
-          <a:xfrm>
-            <a:off x="320040" y="3840480"/>
-            <a:ext cx="960120" cy="457200"/>
-          </a:xfrm>
-          <a:prstGeom prst="rect">
-            <a:avLst/>
-          </a:prstGeom>
-          <a:noFill/>
-          <a:ln/>
-        </p:spPr>
-        <p:txBody>
-          <a:bodyPr wrap="square" lIns="0" tIns="0" rIns="0" bIns="0" rtlCol="0" anchor="ctr"/>
-          <a:lstStyle/>
-          <a:p>
-            <a:pPr marL="0" indent="0" algn="ctr">
-              <a:buNone/>
-            </a:pPr>
-            <a:r>
-              <a:rPr lang="en-US" sz="900" b="1" dirty="0">
-                <a:solidFill>
-                  <a:srgbClr val="FFFFFF"/>
-                </a:solidFill>
-              </a:rPr>
-              <a:t>HIPERCARD</a:t>
-            </a:r>
-            <a:endParaRPr lang="en-US" sz="900" dirty="0"/>
-          </a:p>
-        </p:txBody>
-      </p:sp>
-      <p:sp>
-        <p:nvSpPr>
-          <p:cNvPr id="34" name="Text 32"/>
-          <p:cNvSpPr/>
-          <p:nvPr/>
-        </p:nvSpPr>
-        <p:spPr>
-          <a:xfrm>
-            <a:off x="1353312" y="3867912"/>
-            <a:ext cx="3017520" cy="182880"/>
-          </a:xfrm>
-          <a:prstGeom prst="rect">
-            <a:avLst/>
-          </a:prstGeom>
-          <a:noFill/>
-          <a:ln/>
-        </p:spPr>
-        <p:txBody>
-          <a:bodyPr wrap="square" lIns="0" tIns="0" rIns="0" bIns="0" rtlCol="0" anchor="ctr"/>
-          <a:lstStyle/>
-          <a:p>
-            <a:pPr marL="0" indent="0">
-              <a:buNone/>
-            </a:pPr>
-            <a:r>
-              <a:rPr lang="en-US" sz="900" b="1" dirty="0">
-                <a:solidFill>
-                  <a:srgbClr val="0B1F4B"/>
-                </a:solidFill>
-              </a:rPr>
-              <a:t>sample_interchange_rules.csv</a:t>
-            </a:r>
-            <a:endParaRPr lang="en-US" sz="900" dirty="0"/>
-          </a:p>
-        </p:txBody>
-      </p:sp>
-      <p:sp>
-        <p:nvSpPr>
-          <p:cNvPr id="35" name="Text 33"/>
-          <p:cNvSpPr/>
-          <p:nvPr/>
-        </p:nvSpPr>
-        <p:spPr>
-          <a:xfrm>
-            <a:off x="1353312" y="4078224"/>
-            <a:ext cx="3017520" cy="182880"/>
-          </a:xfrm>
-          <a:prstGeom prst="rect">
-            <a:avLst/>
-          </a:prstGeom>
-          <a:noFill/>
-          <a:ln/>
-        </p:spPr>
-        <p:txBody>
-          <a:bodyPr wrap="square" lIns="0" tIns="0" rIns="0" bIns="0" rtlCol="0" anchor="ctr"/>
-          <a:lstStyle/>
-          <a:p>
-            <a:pPr marL="0" indent="0">
-              <a:buNone/>
-            </a:pPr>
-            <a:r>
-              <a:rPr lang="en-US" sz="800" dirty="0">
-                <a:solidFill>
-                  <a:srgbClr val="64748B"/>
-                </a:solidFill>
-              </a:rPr>
-              <a:t>Hipercard — dados públicos via Itaú Unibanco RI</a:t>
-            </a:r>
-            <a:endParaRPr lang="en-US" sz="800" dirty="0"/>
-          </a:p>
-        </p:txBody>
-      </p:sp>
-      <p:sp>
-        <p:nvSpPr>
-          <p:cNvPr id="36" name="Text 34"/>
-          <p:cNvSpPr/>
-          <p:nvPr/>
-        </p:nvSpPr>
-        <p:spPr>
-          <a:xfrm>
-            <a:off x="4462272" y="3941064"/>
-            <a:ext cx="4297680" cy="237744"/>
-          </a:xfrm>
-          <a:prstGeom prst="rect">
-            <a:avLst/>
-          </a:prstGeom>
-          <a:noFill/>
-          <a:ln/>
-        </p:spPr>
-        <p:txBody>
-          <a:bodyPr wrap="square" lIns="0" tIns="0" rIns="0" bIns="0" rtlCol="0" anchor="ctr"/>
-          <a:lstStyle/>
-          <a:p>
-            <a:pPr marL="0" indent="0">
-              <a:buNone/>
-            </a:pPr>
-            <a:r>
-              <a:rPr lang="en-US" sz="750" i="1" dirty="0">
-                <a:solidFill>
-                  <a:srgbClr val="1A56A0"/>
-                </a:solidFill>
-              </a:rPr>
-              <a:t>hipercard.com.br • itau.com.br/relacoes-com-investidores</a:t>
-            </a:r>
-            <a:endParaRPr lang="en-US" sz="750" dirty="0"/>
-          </a:p>
-        </p:txBody>
-      </p:sp>
-      <p:sp>
-        <p:nvSpPr>
-          <p:cNvPr id="37" name="Shape 35"/>
-          <p:cNvSpPr/>
-          <p:nvPr/>
-        </p:nvSpPr>
-        <p:spPr>
-          <a:xfrm>
-            <a:off x="320040" y="4361688"/>
-            <a:ext cx="8503920" cy="457200"/>
-          </a:xfrm>
-          <a:prstGeom prst="rect">
-            <a:avLst/>
-          </a:prstGeom>
-          <a:solidFill>
-            <a:srgbClr val="EEF4FF"/>
-          </a:solidFill>
-          <a:ln/>
-          <a:effectLst>
-            <a:outerShdw blurRad="101600" dist="38100" dir="8100000" algn="bl" rotWithShape="0">
-              <a:srgbClr val="000000">
-                <a:alpha val="10000"/>
-              </a:srgbClr>
-            </a:outerShdw>
-          </a:effectLst>
-        </p:spPr>
-      </p:sp>
-      <p:sp>
-        <p:nvSpPr>
           <p:cNvPr id="38" name="Shape 36"/>
           <p:cNvSpPr/>
           <p:nvPr/>
         </p:nvSpPr>
         <p:spPr>
           <a:xfrm>
-            <a:off x="320040" y="4361688"/>
+            <a:off x="320040" y="2833878"/>
             <a:ext cx="960120" cy="457200"/>
           </a:xfrm>
           <a:prstGeom prst="rect">
@@ -14719,7 +13989,7 @@
         </p:nvSpPr>
         <p:spPr>
           <a:xfrm>
-            <a:off x="320040" y="4361688"/>
+            <a:off x="320040" y="2833878"/>
             <a:ext cx="960120" cy="457200"/>
           </a:xfrm>
           <a:prstGeom prst="rect">
@@ -14755,7 +14025,7 @@
         </p:nvSpPr>
         <p:spPr>
           <a:xfrm>
-            <a:off x="1353312" y="4389120"/>
+            <a:off x="1353312" y="2861310"/>
             <a:ext cx="3017520" cy="182880"/>
           </a:xfrm>
           <a:prstGeom prst="rect">
@@ -14791,7 +14061,7 @@
         </p:nvSpPr>
         <p:spPr>
           <a:xfrm>
-            <a:off x="1353312" y="4599432"/>
+            <a:off x="1353312" y="3071622"/>
             <a:ext cx="3017520" cy="182880"/>
           </a:xfrm>
           <a:prstGeom prst="rect">
@@ -14827,7 +14097,7 @@
         </p:nvSpPr>
         <p:spPr>
           <a:xfrm>
-            <a:off x="4462272" y="4462272"/>
+            <a:off x="4462272" y="2934462"/>
             <a:ext cx="4297680" cy="237744"/>
           </a:xfrm>
           <a:prstGeom prst="rect">
@@ -14855,6 +14125,66 @@
           </a:p>
         </p:txBody>
       </p:sp>
+      <p:pic>
+        <p:nvPicPr>
+          <p:cNvPr id="44" name="Imagem 43">
+            <a:extLst>
+              <a:ext uri="{FF2B5EF4-FFF2-40B4-BE49-F238E27FC236}">
+                <a16:creationId xmlns:a16="http://schemas.microsoft.com/office/drawing/2014/main" id="{F95739E1-E6B9-4423-93E0-36C91F457BA1}"/>
+              </a:ext>
+            </a:extLst>
+          </p:cNvPr>
+          <p:cNvPicPr>
+            <a:picLocks noChangeAspect="1"/>
+          </p:cNvPicPr>
+          <p:nvPr/>
+        </p:nvPicPr>
+        <p:blipFill>
+          <a:blip r:embed="rId3"/>
+          <a:stretch>
+            <a:fillRect/>
+          </a:stretch>
+        </p:blipFill>
+        <p:spPr>
+          <a:xfrm>
+            <a:off x="1826748" y="3390900"/>
+            <a:ext cx="1513352" cy="1682318"/>
+          </a:xfrm>
+          <a:prstGeom prst="rect">
+            <a:avLst/>
+          </a:prstGeom>
+        </p:spPr>
+      </p:pic>
+      <p:pic>
+        <p:nvPicPr>
+          <p:cNvPr id="46" name="Imagem 45">
+            <a:extLst>
+              <a:ext uri="{FF2B5EF4-FFF2-40B4-BE49-F238E27FC236}">
+                <a16:creationId xmlns:a16="http://schemas.microsoft.com/office/drawing/2014/main" id="{16522426-364E-4B89-9976-50DD9CCB00B6}"/>
+              </a:ext>
+            </a:extLst>
+          </p:cNvPr>
+          <p:cNvPicPr>
+            <a:picLocks noChangeAspect="1"/>
+          </p:cNvPicPr>
+          <p:nvPr/>
+        </p:nvPicPr>
+        <p:blipFill>
+          <a:blip r:embed="rId4"/>
+          <a:stretch>
+            <a:fillRect/>
+          </a:stretch>
+        </p:blipFill>
+        <p:spPr>
+          <a:xfrm>
+            <a:off x="5293874" y="3390900"/>
+            <a:ext cx="1185179" cy="1682318"/>
+          </a:xfrm>
+          <a:prstGeom prst="rect">
+            <a:avLst/>
+          </a:prstGeom>
+        </p:spPr>
+      </p:pic>
     </p:spTree>
   </p:cSld>
   <p:clrMapOvr>
@@ -19049,14 +18379,14 @@
           <p:nvPr>
             <p:extLst>
               <p:ext uri="{D42A27DB-BD31-4B8C-83A1-F6EECF244321}">
-                <p14:modId xmlns:p14="http://schemas.microsoft.com/office/powerpoint/2010/main" val="1579011935"/>
+                <p14:modId xmlns:p14="http://schemas.microsoft.com/office/powerpoint/2010/main" val="1189447451"/>
               </p:ext>
             </p:extLst>
           </p:nvPr>
         </p:nvGraphicFramePr>
         <p:xfrm>
           <a:off x="320040" y="1335024"/>
-          <a:ext cx="5303520" cy="975360"/>
+          <a:ext cx="2779776" cy="975360"/>
         </p:xfrm>
         <a:graphic>
           <a:graphicData uri="http://schemas.openxmlformats.org/drawingml/2006/table">
@@ -19084,27 +18414,6 @@
                     </a:ext>
                   </a:extLst>
                 </a:gridCol>
-                <a:gridCol w="841248">
-                  <a:extLst>
-                    <a:ext uri="{9D8B030D-6E8A-4147-A177-3AD203B41FA5}">
-                      <a16:colId xmlns:a16="http://schemas.microsoft.com/office/drawing/2014/main" val="20003"/>
-                    </a:ext>
-                  </a:extLst>
-                </a:gridCol>
-                <a:gridCol w="841248">
-                  <a:extLst>
-                    <a:ext uri="{9D8B030D-6E8A-4147-A177-3AD203B41FA5}">
-                      <a16:colId xmlns:a16="http://schemas.microsoft.com/office/drawing/2014/main" val="20004"/>
-                    </a:ext>
-                  </a:extLst>
-                </a:gridCol>
-                <a:gridCol w="841248">
-                  <a:extLst>
-                    <a:ext uri="{9D8B030D-6E8A-4147-A177-3AD203B41FA5}">
-                      <a16:colId xmlns:a16="http://schemas.microsoft.com/office/drawing/2014/main" val="20005"/>
-                    </a:ext>
-                  </a:extLst>
-                </a:gridCol>
               </a:tblGrid>
               <a:tr h="0">
                 <a:tc>
@@ -19287,189 +18596,6 @@
                     </a:lnB>
                     <a:solidFill>
                       <a:srgbClr val="C0392B"/>
-                    </a:solidFill>
-                  </a:tcPr>
-                </a:tc>
-                <a:tc>
-                  <a:txBody>
-                    <a:bodyPr/>
-                    <a:lstStyle/>
-                    <a:p>
-                      <a:pPr marL="0" indent="0" algn="ctr">
-                        <a:buNone/>
-                      </a:pPr>
-                      <a:r>
-                        <a:rPr lang="en-US" sz="1000" b="1" dirty="0">
-                          <a:solidFill>
-                            <a:srgbClr val="FFFFFF"/>
-                          </a:solidFill>
-                        </a:rPr>
-                        <a:t>Amex</a:t>
-                      </a:r>
-                      <a:endParaRPr lang="en-US" sz="1000" dirty="0"/>
-                    </a:p>
-                  </a:txBody>
-                  <a:tcPr>
-                    <a:lnL w="6350" cap="flat" cmpd="sng" algn="ctr">
-                      <a:solidFill>
-                        <a:srgbClr val="CBD5E1"/>
-                      </a:solidFill>
-                      <a:prstDash val="solid"/>
-                      <a:round/>
-                      <a:headEnd type="none" w="med" len="med"/>
-                      <a:tailEnd type="none" w="med" len="med"/>
-                    </a:lnL>
-                    <a:lnR w="6350" cap="flat" cmpd="sng" algn="ctr">
-                      <a:solidFill>
-                        <a:srgbClr val="CBD5E1"/>
-                      </a:solidFill>
-                      <a:prstDash val="solid"/>
-                      <a:round/>
-                      <a:headEnd type="none" w="med" len="med"/>
-                      <a:tailEnd type="none" w="med" len="med"/>
-                    </a:lnR>
-                    <a:lnT w="6350" cap="flat" cmpd="sng" algn="ctr">
-                      <a:solidFill>
-                        <a:srgbClr val="CBD5E1"/>
-                      </a:solidFill>
-                      <a:prstDash val="solid"/>
-                      <a:round/>
-                      <a:headEnd type="none" w="med" len="med"/>
-                      <a:tailEnd type="none" w="med" len="med"/>
-                    </a:lnT>
-                    <a:lnB w="6350" cap="flat" cmpd="sng" algn="ctr">
-                      <a:solidFill>
-                        <a:srgbClr val="CBD5E1"/>
-                      </a:solidFill>
-                      <a:prstDash val="solid"/>
-                      <a:round/>
-                      <a:headEnd type="none" w="med" len="med"/>
-                      <a:tailEnd type="none" w="med" len="med"/>
-                    </a:lnB>
-                    <a:solidFill>
-                      <a:srgbClr val="006FCF"/>
-                    </a:solidFill>
-                  </a:tcPr>
-                </a:tc>
-                <a:tc>
-                  <a:txBody>
-                    <a:bodyPr/>
-                    <a:lstStyle/>
-                    <a:p>
-                      <a:pPr marL="0" indent="0" algn="ctr">
-                        <a:buNone/>
-                      </a:pPr>
-                      <a:r>
-                        <a:rPr lang="en-US" sz="1000" b="1" dirty="0">
-                          <a:solidFill>
-                            <a:srgbClr val="FFFFFF"/>
-                          </a:solidFill>
-                        </a:rPr>
-                        <a:t>Elo</a:t>
-                      </a:r>
-                      <a:endParaRPr lang="en-US" sz="1000" dirty="0"/>
-                    </a:p>
-                  </a:txBody>
-                  <a:tcPr>
-                    <a:lnL w="6350" cap="flat" cmpd="sng" algn="ctr">
-                      <a:solidFill>
-                        <a:srgbClr val="CBD5E1"/>
-                      </a:solidFill>
-                      <a:prstDash val="solid"/>
-                      <a:round/>
-                      <a:headEnd type="none" w="med" len="med"/>
-                      <a:tailEnd type="none" w="med" len="med"/>
-                    </a:lnL>
-                    <a:lnR w="6350" cap="flat" cmpd="sng" algn="ctr">
-                      <a:solidFill>
-                        <a:srgbClr val="CBD5E1"/>
-                      </a:solidFill>
-                      <a:prstDash val="solid"/>
-                      <a:round/>
-                      <a:headEnd type="none" w="med" len="med"/>
-                      <a:tailEnd type="none" w="med" len="med"/>
-                    </a:lnR>
-                    <a:lnT w="6350" cap="flat" cmpd="sng" algn="ctr">
-                      <a:solidFill>
-                        <a:srgbClr val="CBD5E1"/>
-                      </a:solidFill>
-                      <a:prstDash val="solid"/>
-                      <a:round/>
-                      <a:headEnd type="none" w="med" len="med"/>
-                      <a:tailEnd type="none" w="med" len="med"/>
-                    </a:lnT>
-                    <a:lnB w="6350" cap="flat" cmpd="sng" algn="ctr">
-                      <a:solidFill>
-                        <a:srgbClr val="CBD5E1"/>
-                      </a:solidFill>
-                      <a:prstDash val="solid"/>
-                      <a:round/>
-                      <a:headEnd type="none" w="med" len="med"/>
-                      <a:tailEnd type="none" w="med" len="med"/>
-                    </a:lnB>
-                    <a:solidFill>
-                      <a:srgbClr val="B8860B"/>
-                    </a:solidFill>
-                  </a:tcPr>
-                </a:tc>
-                <a:tc>
-                  <a:txBody>
-                    <a:bodyPr/>
-                    <a:lstStyle/>
-                    <a:p>
-                      <a:pPr marL="0" indent="0" algn="ctr">
-                        <a:buNone/>
-                      </a:pPr>
-                      <a:r>
-                        <a:rPr lang="en-US" sz="1000" b="1" dirty="0">
-                          <a:solidFill>
-                            <a:srgbClr val="FFFFFF"/>
-                          </a:solidFill>
-                        </a:rPr>
-                        <a:t>Hipercard</a:t>
-                      </a:r>
-                      <a:endParaRPr lang="en-US" sz="1000" dirty="0"/>
-                    </a:p>
-                  </a:txBody>
-                  <a:tcPr>
-                    <a:lnL w="6350" cap="flat" cmpd="sng" algn="ctr">
-                      <a:solidFill>
-                        <a:srgbClr val="CBD5E1"/>
-                      </a:solidFill>
-                      <a:prstDash val="solid"/>
-                      <a:round/>
-                      <a:headEnd type="none" w="med" len="med"/>
-                      <a:tailEnd type="none" w="med" len="med"/>
-                    </a:lnL>
-                    <a:lnR w="6350" cap="flat" cmpd="sng" algn="ctr">
-                      <a:solidFill>
-                        <a:srgbClr val="CBD5E1"/>
-                      </a:solidFill>
-                      <a:prstDash val="solid"/>
-                      <a:round/>
-                      <a:headEnd type="none" w="med" len="med"/>
-                      <a:tailEnd type="none" w="med" len="med"/>
-                    </a:lnR>
-                    <a:lnT w="6350" cap="flat" cmpd="sng" algn="ctr">
-                      <a:solidFill>
-                        <a:srgbClr val="CBD5E1"/>
-                      </a:solidFill>
-                      <a:prstDash val="solid"/>
-                      <a:round/>
-                      <a:headEnd type="none" w="med" len="med"/>
-                      <a:tailEnd type="none" w="med" len="med"/>
-                    </a:lnT>
-                    <a:lnB w="6350" cap="flat" cmpd="sng" algn="ctr">
-                      <a:solidFill>
-                        <a:srgbClr val="CBD5E1"/>
-                      </a:solidFill>
-                      <a:prstDash val="solid"/>
-                      <a:round/>
-                      <a:headEnd type="none" w="med" len="med"/>
-                      <a:tailEnd type="none" w="med" len="med"/>
-                    </a:lnB>
-                    <a:solidFill>
-                      <a:srgbClr val="8B1A1A"/>
                     </a:solidFill>
                   </a:tcPr>
                 </a:tc>
@@ -19617,189 +18743,6 @@
                           </a:solidFill>
                         </a:rPr>
                         <a:t>+0,65%</a:t>
-                      </a:r>
-                      <a:endParaRPr lang="en-US" sz="1000" dirty="0"/>
-                    </a:p>
-                  </a:txBody>
-                  <a:tcPr>
-                    <a:lnL w="6350" cap="flat" cmpd="sng" algn="ctr">
-                      <a:solidFill>
-                        <a:srgbClr val="CBD5E1"/>
-                      </a:solidFill>
-                      <a:prstDash val="solid"/>
-                      <a:round/>
-                      <a:headEnd type="none" w="med" len="med"/>
-                      <a:tailEnd type="none" w="med" len="med"/>
-                    </a:lnL>
-                    <a:lnR w="6350" cap="flat" cmpd="sng" algn="ctr">
-                      <a:solidFill>
-                        <a:srgbClr val="CBD5E1"/>
-                      </a:solidFill>
-                      <a:prstDash val="solid"/>
-                      <a:round/>
-                      <a:headEnd type="none" w="med" len="med"/>
-                      <a:tailEnd type="none" w="med" len="med"/>
-                    </a:lnR>
-                    <a:lnT w="6350" cap="flat" cmpd="sng" algn="ctr">
-                      <a:solidFill>
-                        <a:srgbClr val="CBD5E1"/>
-                      </a:solidFill>
-                      <a:prstDash val="solid"/>
-                      <a:round/>
-                      <a:headEnd type="none" w="med" len="med"/>
-                      <a:tailEnd type="none" w="med" len="med"/>
-                    </a:lnT>
-                    <a:lnB w="6350" cap="flat" cmpd="sng" algn="ctr">
-                      <a:solidFill>
-                        <a:srgbClr val="CBD5E1"/>
-                      </a:solidFill>
-                      <a:prstDash val="solid"/>
-                      <a:round/>
-                      <a:headEnd type="none" w="med" len="med"/>
-                      <a:tailEnd type="none" w="med" len="med"/>
-                    </a:lnB>
-                    <a:solidFill>
-                      <a:srgbClr val="FFFFFF"/>
-                    </a:solidFill>
-                  </a:tcPr>
-                </a:tc>
-                <a:tc>
-                  <a:txBody>
-                    <a:bodyPr/>
-                    <a:lstStyle/>
-                    <a:p>
-                      <a:pPr marL="0" indent="0" algn="ctr">
-                        <a:buNone/>
-                      </a:pPr>
-                      <a:r>
-                        <a:rPr lang="en-US" sz="1000" dirty="0">
-                          <a:solidFill>
-                            <a:srgbClr val="DC2626"/>
-                          </a:solidFill>
-                        </a:rPr>
-                        <a:t>+0,45%</a:t>
-                      </a:r>
-                      <a:endParaRPr lang="en-US" sz="1000" dirty="0"/>
-                    </a:p>
-                  </a:txBody>
-                  <a:tcPr>
-                    <a:lnL w="6350" cap="flat" cmpd="sng" algn="ctr">
-                      <a:solidFill>
-                        <a:srgbClr val="CBD5E1"/>
-                      </a:solidFill>
-                      <a:prstDash val="solid"/>
-                      <a:round/>
-                      <a:headEnd type="none" w="med" len="med"/>
-                      <a:tailEnd type="none" w="med" len="med"/>
-                    </a:lnL>
-                    <a:lnR w="6350" cap="flat" cmpd="sng" algn="ctr">
-                      <a:solidFill>
-                        <a:srgbClr val="CBD5E1"/>
-                      </a:solidFill>
-                      <a:prstDash val="solid"/>
-                      <a:round/>
-                      <a:headEnd type="none" w="med" len="med"/>
-                      <a:tailEnd type="none" w="med" len="med"/>
-                    </a:lnR>
-                    <a:lnT w="6350" cap="flat" cmpd="sng" algn="ctr">
-                      <a:solidFill>
-                        <a:srgbClr val="CBD5E1"/>
-                      </a:solidFill>
-                      <a:prstDash val="solid"/>
-                      <a:round/>
-                      <a:headEnd type="none" w="med" len="med"/>
-                      <a:tailEnd type="none" w="med" len="med"/>
-                    </a:lnT>
-                    <a:lnB w="6350" cap="flat" cmpd="sng" algn="ctr">
-                      <a:solidFill>
-                        <a:srgbClr val="CBD5E1"/>
-                      </a:solidFill>
-                      <a:prstDash val="solid"/>
-                      <a:round/>
-                      <a:headEnd type="none" w="med" len="med"/>
-                      <a:tailEnd type="none" w="med" len="med"/>
-                    </a:lnB>
-                    <a:solidFill>
-                      <a:srgbClr val="FFFFFF"/>
-                    </a:solidFill>
-                  </a:tcPr>
-                </a:tc>
-                <a:tc>
-                  <a:txBody>
-                    <a:bodyPr/>
-                    <a:lstStyle/>
-                    <a:p>
-                      <a:pPr marL="0" indent="0" algn="ctr">
-                        <a:buNone/>
-                      </a:pPr>
-                      <a:r>
-                        <a:rPr lang="en-US" sz="1000" dirty="0">
-                          <a:solidFill>
-                            <a:srgbClr val="DC2626"/>
-                          </a:solidFill>
-                        </a:rPr>
-                        <a:t>+0,55%</a:t>
-                      </a:r>
-                      <a:endParaRPr lang="en-US" sz="1000" dirty="0"/>
-                    </a:p>
-                  </a:txBody>
-                  <a:tcPr>
-                    <a:lnL w="6350" cap="flat" cmpd="sng" algn="ctr">
-                      <a:solidFill>
-                        <a:srgbClr val="CBD5E1"/>
-                      </a:solidFill>
-                      <a:prstDash val="solid"/>
-                      <a:round/>
-                      <a:headEnd type="none" w="med" len="med"/>
-                      <a:tailEnd type="none" w="med" len="med"/>
-                    </a:lnL>
-                    <a:lnR w="6350" cap="flat" cmpd="sng" algn="ctr">
-                      <a:solidFill>
-                        <a:srgbClr val="CBD5E1"/>
-                      </a:solidFill>
-                      <a:prstDash val="solid"/>
-                      <a:round/>
-                      <a:headEnd type="none" w="med" len="med"/>
-                      <a:tailEnd type="none" w="med" len="med"/>
-                    </a:lnR>
-                    <a:lnT w="6350" cap="flat" cmpd="sng" algn="ctr">
-                      <a:solidFill>
-                        <a:srgbClr val="CBD5E1"/>
-                      </a:solidFill>
-                      <a:prstDash val="solid"/>
-                      <a:round/>
-                      <a:headEnd type="none" w="med" len="med"/>
-                      <a:tailEnd type="none" w="med" len="med"/>
-                    </a:lnT>
-                    <a:lnB w="6350" cap="flat" cmpd="sng" algn="ctr">
-                      <a:solidFill>
-                        <a:srgbClr val="CBD5E1"/>
-                      </a:solidFill>
-                      <a:prstDash val="solid"/>
-                      <a:round/>
-                      <a:headEnd type="none" w="med" len="med"/>
-                      <a:tailEnd type="none" w="med" len="med"/>
-                    </a:lnB>
-                    <a:solidFill>
-                      <a:srgbClr val="FFFFFF"/>
-                    </a:solidFill>
-                  </a:tcPr>
-                </a:tc>
-                <a:tc>
-                  <a:txBody>
-                    <a:bodyPr/>
-                    <a:lstStyle/>
-                    <a:p>
-                      <a:pPr marL="0" indent="0" algn="ctr">
-                        <a:buNone/>
-                      </a:pPr>
-                      <a:r>
-                        <a:rPr lang="en-US" sz="1000" dirty="0">
-                          <a:solidFill>
-                            <a:srgbClr val="DC2626"/>
-                          </a:solidFill>
-                        </a:rPr>
-                        <a:t>+0,50%</a:t>
                       </a:r>
                       <a:endParaRPr lang="en-US" sz="1000" dirty="0"/>
                     </a:p>
@@ -20036,189 +18979,6 @@
                     </a:solidFill>
                   </a:tcPr>
                 </a:tc>
-                <a:tc>
-                  <a:txBody>
-                    <a:bodyPr/>
-                    <a:lstStyle/>
-                    <a:p>
-                      <a:pPr marL="0" indent="0" algn="ctr">
-                        <a:buNone/>
-                      </a:pPr>
-                      <a:r>
-                        <a:rPr lang="en-US" sz="1000" dirty="0">
-                          <a:solidFill>
-                            <a:srgbClr val="DC2626"/>
-                          </a:solidFill>
-                        </a:rPr>
-                        <a:t>+1,10%</a:t>
-                      </a:r>
-                      <a:endParaRPr lang="en-US" sz="1000" dirty="0"/>
-                    </a:p>
-                  </a:txBody>
-                  <a:tcPr>
-                    <a:lnL w="6350" cap="flat" cmpd="sng" algn="ctr">
-                      <a:solidFill>
-                        <a:srgbClr val="CBD5E1"/>
-                      </a:solidFill>
-                      <a:prstDash val="solid"/>
-                      <a:round/>
-                      <a:headEnd type="none" w="med" len="med"/>
-                      <a:tailEnd type="none" w="med" len="med"/>
-                    </a:lnL>
-                    <a:lnR w="6350" cap="flat" cmpd="sng" algn="ctr">
-                      <a:solidFill>
-                        <a:srgbClr val="CBD5E1"/>
-                      </a:solidFill>
-                      <a:prstDash val="solid"/>
-                      <a:round/>
-                      <a:headEnd type="none" w="med" len="med"/>
-                      <a:tailEnd type="none" w="med" len="med"/>
-                    </a:lnR>
-                    <a:lnT w="6350" cap="flat" cmpd="sng" algn="ctr">
-                      <a:solidFill>
-                        <a:srgbClr val="CBD5E1"/>
-                      </a:solidFill>
-                      <a:prstDash val="solid"/>
-                      <a:round/>
-                      <a:headEnd type="none" w="med" len="med"/>
-                      <a:tailEnd type="none" w="med" len="med"/>
-                    </a:lnT>
-                    <a:lnB w="6350" cap="flat" cmpd="sng" algn="ctr">
-                      <a:solidFill>
-                        <a:srgbClr val="CBD5E1"/>
-                      </a:solidFill>
-                      <a:prstDash val="solid"/>
-                      <a:round/>
-                      <a:headEnd type="none" w="med" len="med"/>
-                      <a:tailEnd type="none" w="med" len="med"/>
-                    </a:lnB>
-                    <a:solidFill>
-                      <a:srgbClr val="EEF4FF"/>
-                    </a:solidFill>
-                  </a:tcPr>
-                </a:tc>
-                <a:tc>
-                  <a:txBody>
-                    <a:bodyPr/>
-                    <a:lstStyle/>
-                    <a:p>
-                      <a:pPr marL="0" indent="0" algn="ctr">
-                        <a:buNone/>
-                      </a:pPr>
-                      <a:r>
-                        <a:rPr lang="en-US" sz="1000" dirty="0">
-                          <a:solidFill>
-                            <a:srgbClr val="DC2626"/>
-                          </a:solidFill>
-                        </a:rPr>
-                        <a:t>+0,95%</a:t>
-                      </a:r>
-                      <a:endParaRPr lang="en-US" sz="1000" dirty="0"/>
-                    </a:p>
-                  </a:txBody>
-                  <a:tcPr>
-                    <a:lnL w="6350" cap="flat" cmpd="sng" algn="ctr">
-                      <a:solidFill>
-                        <a:srgbClr val="CBD5E1"/>
-                      </a:solidFill>
-                      <a:prstDash val="solid"/>
-                      <a:round/>
-                      <a:headEnd type="none" w="med" len="med"/>
-                      <a:tailEnd type="none" w="med" len="med"/>
-                    </a:lnL>
-                    <a:lnR w="6350" cap="flat" cmpd="sng" algn="ctr">
-                      <a:solidFill>
-                        <a:srgbClr val="CBD5E1"/>
-                      </a:solidFill>
-                      <a:prstDash val="solid"/>
-                      <a:round/>
-                      <a:headEnd type="none" w="med" len="med"/>
-                      <a:tailEnd type="none" w="med" len="med"/>
-                    </a:lnR>
-                    <a:lnT w="6350" cap="flat" cmpd="sng" algn="ctr">
-                      <a:solidFill>
-                        <a:srgbClr val="CBD5E1"/>
-                      </a:solidFill>
-                      <a:prstDash val="solid"/>
-                      <a:round/>
-                      <a:headEnd type="none" w="med" len="med"/>
-                      <a:tailEnd type="none" w="med" len="med"/>
-                    </a:lnT>
-                    <a:lnB w="6350" cap="flat" cmpd="sng" algn="ctr">
-                      <a:solidFill>
-                        <a:srgbClr val="CBD5E1"/>
-                      </a:solidFill>
-                      <a:prstDash val="solid"/>
-                      <a:round/>
-                      <a:headEnd type="none" w="med" len="med"/>
-                      <a:tailEnd type="none" w="med" len="med"/>
-                    </a:lnB>
-                    <a:solidFill>
-                      <a:srgbClr val="EEF4FF"/>
-                    </a:solidFill>
-                  </a:tcPr>
-                </a:tc>
-                <a:tc>
-                  <a:txBody>
-                    <a:bodyPr/>
-                    <a:lstStyle/>
-                    <a:p>
-                      <a:pPr marL="0" indent="0" algn="ctr">
-                        <a:buNone/>
-                      </a:pPr>
-                      <a:r>
-                        <a:rPr lang="en-US" sz="1000" dirty="0">
-                          <a:solidFill>
-                            <a:srgbClr val="DC2626"/>
-                          </a:solidFill>
-                        </a:rPr>
-                        <a:t>+0,85%</a:t>
-                      </a:r>
-                      <a:endParaRPr lang="en-US" sz="1000" dirty="0"/>
-                    </a:p>
-                  </a:txBody>
-                  <a:tcPr>
-                    <a:lnL w="6350" cap="flat" cmpd="sng" algn="ctr">
-                      <a:solidFill>
-                        <a:srgbClr val="CBD5E1"/>
-                      </a:solidFill>
-                      <a:prstDash val="solid"/>
-                      <a:round/>
-                      <a:headEnd type="none" w="med" len="med"/>
-                      <a:tailEnd type="none" w="med" len="med"/>
-                    </a:lnL>
-                    <a:lnR w="6350" cap="flat" cmpd="sng" algn="ctr">
-                      <a:solidFill>
-                        <a:srgbClr val="CBD5E1"/>
-                      </a:solidFill>
-                      <a:prstDash val="solid"/>
-                      <a:round/>
-                      <a:headEnd type="none" w="med" len="med"/>
-                      <a:tailEnd type="none" w="med" len="med"/>
-                    </a:lnR>
-                    <a:lnT w="6350" cap="flat" cmpd="sng" algn="ctr">
-                      <a:solidFill>
-                        <a:srgbClr val="CBD5E1"/>
-                      </a:solidFill>
-                      <a:prstDash val="solid"/>
-                      <a:round/>
-                      <a:headEnd type="none" w="med" len="med"/>
-                      <a:tailEnd type="none" w="med" len="med"/>
-                    </a:lnT>
-                    <a:lnB w="6350" cap="flat" cmpd="sng" algn="ctr">
-                      <a:solidFill>
-                        <a:srgbClr val="CBD5E1"/>
-                      </a:solidFill>
-                      <a:prstDash val="solid"/>
-                      <a:round/>
-                      <a:headEnd type="none" w="med" len="med"/>
-                      <a:tailEnd type="none" w="med" len="med"/>
-                    </a:lnB>
-                    <a:solidFill>
-                      <a:srgbClr val="EEF4FF"/>
-                    </a:solidFill>
-                  </a:tcPr>
-                </a:tc>
                 <a:extLst>
                   <a:ext uri="{0D108BD9-81ED-4DB2-BD59-A6C34878D82A}">
                     <a16:rowId xmlns:a16="http://schemas.microsoft.com/office/drawing/2014/main" val="10002"/>
@@ -20409,189 +19169,6 @@
                     </a:solidFill>
                   </a:tcPr>
                 </a:tc>
-                <a:tc>
-                  <a:txBody>
-                    <a:bodyPr/>
-                    <a:lstStyle/>
-                    <a:p>
-                      <a:pPr marL="0" indent="0" algn="ctr">
-                        <a:buNone/>
-                      </a:pPr>
-                      <a:r>
-                        <a:rPr lang="en-US" sz="1000" dirty="0">
-                          <a:solidFill>
-                            <a:srgbClr val="C0392B"/>
-                          </a:solidFill>
-                        </a:rPr>
-                        <a:t>—</a:t>
-                      </a:r>
-                      <a:endParaRPr lang="en-US" sz="1000" dirty="0"/>
-                    </a:p>
-                  </a:txBody>
-                  <a:tcPr>
-                    <a:lnL w="6350" cap="flat" cmpd="sng" algn="ctr">
-                      <a:solidFill>
-                        <a:srgbClr val="CBD5E1"/>
-                      </a:solidFill>
-                      <a:prstDash val="solid"/>
-                      <a:round/>
-                      <a:headEnd type="none" w="med" len="med"/>
-                      <a:tailEnd type="none" w="med" len="med"/>
-                    </a:lnL>
-                    <a:lnR w="6350" cap="flat" cmpd="sng" algn="ctr">
-                      <a:solidFill>
-                        <a:srgbClr val="CBD5E1"/>
-                      </a:solidFill>
-                      <a:prstDash val="solid"/>
-                      <a:round/>
-                      <a:headEnd type="none" w="med" len="med"/>
-                      <a:tailEnd type="none" w="med" len="med"/>
-                    </a:lnR>
-                    <a:lnT w="6350" cap="flat" cmpd="sng" algn="ctr">
-                      <a:solidFill>
-                        <a:srgbClr val="CBD5E1"/>
-                      </a:solidFill>
-                      <a:prstDash val="solid"/>
-                      <a:round/>
-                      <a:headEnd type="none" w="med" len="med"/>
-                      <a:tailEnd type="none" w="med" len="med"/>
-                    </a:lnT>
-                    <a:lnB w="6350" cap="flat" cmpd="sng" algn="ctr">
-                      <a:solidFill>
-                        <a:srgbClr val="CBD5E1"/>
-                      </a:solidFill>
-                      <a:prstDash val="solid"/>
-                      <a:round/>
-                      <a:headEnd type="none" w="med" len="med"/>
-                      <a:tailEnd type="none" w="med" len="med"/>
-                    </a:lnB>
-                    <a:solidFill>
-                      <a:srgbClr val="FFFFFF"/>
-                    </a:solidFill>
-                  </a:tcPr>
-                </a:tc>
-                <a:tc>
-                  <a:txBody>
-                    <a:bodyPr/>
-                    <a:lstStyle/>
-                    <a:p>
-                      <a:pPr marL="0" indent="0" algn="ctr">
-                        <a:buNone/>
-                      </a:pPr>
-                      <a:r>
-                        <a:rPr lang="en-US" sz="1000" dirty="0">
-                          <a:solidFill>
-                            <a:srgbClr val="C0392B"/>
-                          </a:solidFill>
-                        </a:rPr>
-                        <a:t>—</a:t>
-                      </a:r>
-                      <a:endParaRPr lang="en-US" sz="1000" dirty="0"/>
-                    </a:p>
-                  </a:txBody>
-                  <a:tcPr>
-                    <a:lnL w="6350" cap="flat" cmpd="sng" algn="ctr">
-                      <a:solidFill>
-                        <a:srgbClr val="CBD5E1"/>
-                      </a:solidFill>
-                      <a:prstDash val="solid"/>
-                      <a:round/>
-                      <a:headEnd type="none" w="med" len="med"/>
-                      <a:tailEnd type="none" w="med" len="med"/>
-                    </a:lnL>
-                    <a:lnR w="6350" cap="flat" cmpd="sng" algn="ctr">
-                      <a:solidFill>
-                        <a:srgbClr val="CBD5E1"/>
-                      </a:solidFill>
-                      <a:prstDash val="solid"/>
-                      <a:round/>
-                      <a:headEnd type="none" w="med" len="med"/>
-                      <a:tailEnd type="none" w="med" len="med"/>
-                    </a:lnR>
-                    <a:lnT w="6350" cap="flat" cmpd="sng" algn="ctr">
-                      <a:solidFill>
-                        <a:srgbClr val="CBD5E1"/>
-                      </a:solidFill>
-                      <a:prstDash val="solid"/>
-                      <a:round/>
-                      <a:headEnd type="none" w="med" len="med"/>
-                      <a:tailEnd type="none" w="med" len="med"/>
-                    </a:lnT>
-                    <a:lnB w="6350" cap="flat" cmpd="sng" algn="ctr">
-                      <a:solidFill>
-                        <a:srgbClr val="CBD5E1"/>
-                      </a:solidFill>
-                      <a:prstDash val="solid"/>
-                      <a:round/>
-                      <a:headEnd type="none" w="med" len="med"/>
-                      <a:tailEnd type="none" w="med" len="med"/>
-                    </a:lnB>
-                    <a:solidFill>
-                      <a:srgbClr val="FFFFFF"/>
-                    </a:solidFill>
-                  </a:tcPr>
-                </a:tc>
-                <a:tc>
-                  <a:txBody>
-                    <a:bodyPr/>
-                    <a:lstStyle/>
-                    <a:p>
-                      <a:pPr marL="0" indent="0" algn="ctr">
-                        <a:buNone/>
-                      </a:pPr>
-                      <a:r>
-                        <a:rPr lang="en-US" sz="1000" dirty="0">
-                          <a:solidFill>
-                            <a:srgbClr val="C0392B"/>
-                          </a:solidFill>
-                        </a:rPr>
-                        <a:t>—</a:t>
-                      </a:r>
-                      <a:endParaRPr lang="en-US" sz="1000" dirty="0"/>
-                    </a:p>
-                  </a:txBody>
-                  <a:tcPr>
-                    <a:lnL w="6350" cap="flat" cmpd="sng" algn="ctr">
-                      <a:solidFill>
-                        <a:srgbClr val="CBD5E1"/>
-                      </a:solidFill>
-                      <a:prstDash val="solid"/>
-                      <a:round/>
-                      <a:headEnd type="none" w="med" len="med"/>
-                      <a:tailEnd type="none" w="med" len="med"/>
-                    </a:lnL>
-                    <a:lnR w="6350" cap="flat" cmpd="sng" algn="ctr">
-                      <a:solidFill>
-                        <a:srgbClr val="CBD5E1"/>
-                      </a:solidFill>
-                      <a:prstDash val="solid"/>
-                      <a:round/>
-                      <a:headEnd type="none" w="med" len="med"/>
-                      <a:tailEnd type="none" w="med" len="med"/>
-                    </a:lnR>
-                    <a:lnT w="6350" cap="flat" cmpd="sng" algn="ctr">
-                      <a:solidFill>
-                        <a:srgbClr val="CBD5E1"/>
-                      </a:solidFill>
-                      <a:prstDash val="solid"/>
-                      <a:round/>
-                      <a:headEnd type="none" w="med" len="med"/>
-                      <a:tailEnd type="none" w="med" len="med"/>
-                    </a:lnT>
-                    <a:lnB w="6350" cap="flat" cmpd="sng" algn="ctr">
-                      <a:solidFill>
-                        <a:srgbClr val="CBD5E1"/>
-                      </a:solidFill>
-                      <a:prstDash val="solid"/>
-                      <a:round/>
-                      <a:headEnd type="none" w="med" len="med"/>
-                      <a:tailEnd type="none" w="med" len="med"/>
-                    </a:lnB>
-                    <a:solidFill>
-                      <a:srgbClr val="FFFFFF"/>
-                    </a:solidFill>
-                  </a:tcPr>
-                </a:tc>
                 <a:extLst>
                   <a:ext uri="{0D108BD9-81ED-4DB2-BD59-A6C34878D82A}">
                     <a16:rowId xmlns:a16="http://schemas.microsoft.com/office/drawing/2014/main" val="10003"/>
@@ -20610,7 +19187,7 @@
         </p:nvSpPr>
         <p:spPr>
           <a:xfrm>
-            <a:off x="5806440" y="1024128"/>
+            <a:off x="5146040" y="1005840"/>
             <a:ext cx="3108960" cy="274320"/>
           </a:xfrm>
           <a:prstGeom prst="rect">
@@ -20647,13 +19224,13 @@
           <p:nvPr>
             <p:extLst>
               <p:ext uri="{D42A27DB-BD31-4B8C-83A1-F6EECF244321}">
-                <p14:modId xmlns:p14="http://schemas.microsoft.com/office/powerpoint/2010/main" val="1579011935"/>
+                <p14:modId xmlns:p14="http://schemas.microsoft.com/office/powerpoint/2010/main" val="408813770"/>
               </p:ext>
             </p:extLst>
           </p:nvPr>
         </p:nvGraphicFramePr>
         <p:xfrm>
-          <a:off x="5806440" y="1335024"/>
+          <a:off x="5146040" y="1289939"/>
           <a:ext cx="3017520" cy="1463040"/>
         </p:xfrm>
         <a:graphic>
@@ -21872,14 +20449,14 @@
           <p:nvPr>
             <p:extLst>
               <p:ext uri="{D42A27DB-BD31-4B8C-83A1-F6EECF244321}">
-                <p14:modId xmlns:p14="http://schemas.microsoft.com/office/powerpoint/2010/main" val="1579011935"/>
+                <p14:modId xmlns:p14="http://schemas.microsoft.com/office/powerpoint/2010/main" val="459041488"/>
               </p:ext>
             </p:extLst>
           </p:nvPr>
         </p:nvGraphicFramePr>
         <p:xfrm>
           <a:off x="320040" y="3429000"/>
-          <a:ext cx="2560320" cy="1219200"/>
+          <a:ext cx="2560320" cy="731520"/>
         </p:xfrm>
         <a:graphic>
           <a:graphicData uri="http://schemas.openxmlformats.org/drawingml/2006/table">
@@ -22288,264 +20865,6 @@
                   </a:ext>
                 </a:extLst>
               </a:tr>
-              <a:tr h="0">
-                <a:tc>
-                  <a:txBody>
-                    <a:bodyPr/>
-                    <a:lstStyle/>
-                    <a:p>
-                      <a:pPr marL="0" indent="0" algn="ctr">
-                        <a:buNone/>
-                      </a:pPr>
-                      <a:r>
-                        <a:rPr lang="en-US" sz="1000" dirty="0">
-                          <a:solidFill>
-                            <a:srgbClr val="1E293B"/>
-                          </a:solidFill>
-                        </a:rPr>
-                        <a:t>Amex</a:t>
-                      </a:r>
-                      <a:endParaRPr lang="en-US" sz="1000" dirty="0"/>
-                    </a:p>
-                  </a:txBody>
-                  <a:tcPr>
-                    <a:lnL w="6350" cap="flat" cmpd="sng" algn="ctr">
-                      <a:solidFill>
-                        <a:srgbClr val="CBD5E1"/>
-                      </a:solidFill>
-                      <a:prstDash val="solid"/>
-                      <a:round/>
-                      <a:headEnd type="none" w="med" len="med"/>
-                      <a:tailEnd type="none" w="med" len="med"/>
-                    </a:lnL>
-                    <a:lnR w="6350" cap="flat" cmpd="sng" algn="ctr">
-                      <a:solidFill>
-                        <a:srgbClr val="CBD5E1"/>
-                      </a:solidFill>
-                      <a:prstDash val="solid"/>
-                      <a:round/>
-                      <a:headEnd type="none" w="med" len="med"/>
-                      <a:tailEnd type="none" w="med" len="med"/>
-                    </a:lnR>
-                    <a:lnT w="6350" cap="flat" cmpd="sng" algn="ctr">
-                      <a:solidFill>
-                        <a:srgbClr val="CBD5E1"/>
-                      </a:solidFill>
-                      <a:prstDash val="solid"/>
-                      <a:round/>
-                      <a:headEnd type="none" w="med" len="med"/>
-                      <a:tailEnd type="none" w="med" len="med"/>
-                    </a:lnT>
-                    <a:lnB w="6350" cap="flat" cmpd="sng" algn="ctr">
-                      <a:solidFill>
-                        <a:srgbClr val="CBD5E1"/>
-                      </a:solidFill>
-                      <a:prstDash val="solid"/>
-                      <a:round/>
-                      <a:headEnd type="none" w="med" len="med"/>
-                      <a:tailEnd type="none" w="med" len="med"/>
-                    </a:lnB>
-                    <a:solidFill>
-                      <a:srgbClr val="EEF4FF"/>
-                    </a:solidFill>
-                  </a:tcPr>
-                </a:tc>
-                <a:tc>
-                  <a:txBody>
-                    <a:bodyPr/>
-                    <a:lstStyle/>
-                    <a:p>
-                      <a:pPr marL="0" indent="0" algn="ctr">
-                        <a:buNone/>
-                      </a:pPr>
-                      <a:r>
-                        <a:rPr lang="en-US" sz="1000" dirty="0">
-                          <a:solidFill>
-                            <a:srgbClr val="1E293B"/>
-                          </a:solidFill>
-                        </a:rPr>
-                        <a:t>0,00%</a:t>
-                      </a:r>
-                      <a:endParaRPr lang="en-US" sz="1000" dirty="0"/>
-                    </a:p>
-                  </a:txBody>
-                  <a:tcPr>
-                    <a:lnL w="6350" cap="flat" cmpd="sng" algn="ctr">
-                      <a:solidFill>
-                        <a:srgbClr val="CBD5E1"/>
-                      </a:solidFill>
-                      <a:prstDash val="solid"/>
-                      <a:round/>
-                      <a:headEnd type="none" w="med" len="med"/>
-                      <a:tailEnd type="none" w="med" len="med"/>
-                    </a:lnL>
-                    <a:lnR w="6350" cap="flat" cmpd="sng" algn="ctr">
-                      <a:solidFill>
-                        <a:srgbClr val="CBD5E1"/>
-                      </a:solidFill>
-                      <a:prstDash val="solid"/>
-                      <a:round/>
-                      <a:headEnd type="none" w="med" len="med"/>
-                      <a:tailEnd type="none" w="med" len="med"/>
-                    </a:lnR>
-                    <a:lnT w="6350" cap="flat" cmpd="sng" algn="ctr">
-                      <a:solidFill>
-                        <a:srgbClr val="CBD5E1"/>
-                      </a:solidFill>
-                      <a:prstDash val="solid"/>
-                      <a:round/>
-                      <a:headEnd type="none" w="med" len="med"/>
-                      <a:tailEnd type="none" w="med" len="med"/>
-                    </a:lnT>
-                    <a:lnB w="6350" cap="flat" cmpd="sng" algn="ctr">
-                      <a:solidFill>
-                        <a:srgbClr val="CBD5E1"/>
-                      </a:solidFill>
-                      <a:prstDash val="solid"/>
-                      <a:round/>
-                      <a:headEnd type="none" w="med" len="med"/>
-                      <a:tailEnd type="none" w="med" len="med"/>
-                    </a:lnB>
-                    <a:solidFill>
-                      <a:srgbClr val="EEF4FF"/>
-                    </a:solidFill>
-                  </a:tcPr>
-                </a:tc>
-                <a:extLst>
-                  <a:ext uri="{0D108BD9-81ED-4DB2-BD59-A6C34878D82A}">
-                    <a16:rowId xmlns:a16="http://schemas.microsoft.com/office/drawing/2014/main" val="10003"/>
-                  </a:ext>
-                </a:extLst>
-              </a:tr>
-              <a:tr h="0">
-                <a:tc>
-                  <a:txBody>
-                    <a:bodyPr/>
-                    <a:lstStyle/>
-                    <a:p>
-                      <a:pPr marL="0" indent="0" algn="ctr">
-                        <a:buNone/>
-                      </a:pPr>
-                      <a:r>
-                        <a:rPr lang="en-US" sz="1000" dirty="0">
-                          <a:solidFill>
-                            <a:srgbClr val="1E293B"/>
-                          </a:solidFill>
-                        </a:rPr>
-                        <a:t>Elo</a:t>
-                      </a:r>
-                      <a:endParaRPr lang="en-US" sz="1000" dirty="0"/>
-                    </a:p>
-                  </a:txBody>
-                  <a:tcPr>
-                    <a:lnL w="6350" cap="flat" cmpd="sng" algn="ctr">
-                      <a:solidFill>
-                        <a:srgbClr val="CBD5E1"/>
-                      </a:solidFill>
-                      <a:prstDash val="solid"/>
-                      <a:round/>
-                      <a:headEnd type="none" w="med" len="med"/>
-                      <a:tailEnd type="none" w="med" len="med"/>
-                    </a:lnL>
-                    <a:lnR w="6350" cap="flat" cmpd="sng" algn="ctr">
-                      <a:solidFill>
-                        <a:srgbClr val="CBD5E1"/>
-                      </a:solidFill>
-                      <a:prstDash val="solid"/>
-                      <a:round/>
-                      <a:headEnd type="none" w="med" len="med"/>
-                      <a:tailEnd type="none" w="med" len="med"/>
-                    </a:lnR>
-                    <a:lnT w="6350" cap="flat" cmpd="sng" algn="ctr">
-                      <a:solidFill>
-                        <a:srgbClr val="CBD5E1"/>
-                      </a:solidFill>
-                      <a:prstDash val="solid"/>
-                      <a:round/>
-                      <a:headEnd type="none" w="med" len="med"/>
-                      <a:tailEnd type="none" w="med" len="med"/>
-                    </a:lnT>
-                    <a:lnB w="6350" cap="flat" cmpd="sng" algn="ctr">
-                      <a:solidFill>
-                        <a:srgbClr val="CBD5E1"/>
-                      </a:solidFill>
-                      <a:prstDash val="solid"/>
-                      <a:round/>
-                      <a:headEnd type="none" w="med" len="med"/>
-                      <a:tailEnd type="none" w="med" len="med"/>
-                    </a:lnB>
-                    <a:solidFill>
-                      <a:srgbClr val="FFFFFF"/>
-                    </a:solidFill>
-                  </a:tcPr>
-                </a:tc>
-                <a:tc>
-                  <a:txBody>
-                    <a:bodyPr/>
-                    <a:lstStyle/>
-                    <a:p>
-                      <a:pPr marL="0" indent="0" algn="ctr">
-                        <a:buNone/>
-                      </a:pPr>
-                      <a:r>
-                        <a:rPr lang="en-US" sz="1000" dirty="0">
-                          <a:solidFill>
-                            <a:srgbClr val="DC2626"/>
-                          </a:solidFill>
-                        </a:rPr>
-                        <a:t>+0,03%</a:t>
-                      </a:r>
-                      <a:endParaRPr lang="en-US" sz="1000" dirty="0"/>
-                    </a:p>
-                  </a:txBody>
-                  <a:tcPr>
-                    <a:lnL w="6350" cap="flat" cmpd="sng" algn="ctr">
-                      <a:solidFill>
-                        <a:srgbClr val="CBD5E1"/>
-                      </a:solidFill>
-                      <a:prstDash val="solid"/>
-                      <a:round/>
-                      <a:headEnd type="none" w="med" len="med"/>
-                      <a:tailEnd type="none" w="med" len="med"/>
-                    </a:lnL>
-                    <a:lnR w="6350" cap="flat" cmpd="sng" algn="ctr">
-                      <a:solidFill>
-                        <a:srgbClr val="CBD5E1"/>
-                      </a:solidFill>
-                      <a:prstDash val="solid"/>
-                      <a:round/>
-                      <a:headEnd type="none" w="med" len="med"/>
-                      <a:tailEnd type="none" w="med" len="med"/>
-                    </a:lnR>
-                    <a:lnT w="6350" cap="flat" cmpd="sng" algn="ctr">
-                      <a:solidFill>
-                        <a:srgbClr val="CBD5E1"/>
-                      </a:solidFill>
-                      <a:prstDash val="solid"/>
-                      <a:round/>
-                      <a:headEnd type="none" w="med" len="med"/>
-                      <a:tailEnd type="none" w="med" len="med"/>
-                    </a:lnT>
-                    <a:lnB w="6350" cap="flat" cmpd="sng" algn="ctr">
-                      <a:solidFill>
-                        <a:srgbClr val="CBD5E1"/>
-                      </a:solidFill>
-                      <a:prstDash val="solid"/>
-                      <a:round/>
-                      <a:headEnd type="none" w="med" len="med"/>
-                      <a:tailEnd type="none" w="med" len="med"/>
-                    </a:lnB>
-                    <a:solidFill>
-                      <a:srgbClr val="FFFFFF"/>
-                    </a:solidFill>
-                  </a:tcPr>
-                </a:tc>
-                <a:extLst>
-                  <a:ext uri="{0D108BD9-81ED-4DB2-BD59-A6C34878D82A}">
-                    <a16:rowId xmlns:a16="http://schemas.microsoft.com/office/drawing/2014/main" val="10004"/>
-                  </a:ext>
-                </a:extLst>
-              </a:tr>
             </a:tbl>
           </a:graphicData>
         </a:graphic>
@@ -22558,7 +20877,7 @@
         </p:nvSpPr>
         <p:spPr>
           <a:xfrm>
-            <a:off x="3108960" y="3127248"/>
+            <a:off x="3200400" y="2902966"/>
             <a:ext cx="5715000" cy="1920240"/>
           </a:xfrm>
           <a:prstGeom prst="rect">
@@ -22585,7 +20904,7 @@
         </p:nvSpPr>
         <p:spPr>
           <a:xfrm>
-            <a:off x="3108960" y="3127248"/>
+            <a:off x="3200400" y="2902966"/>
             <a:ext cx="5715000" cy="347472"/>
           </a:xfrm>
           <a:prstGeom prst="rect">
@@ -22605,7 +20924,7 @@
         </p:nvSpPr>
         <p:spPr>
           <a:xfrm>
-            <a:off x="3108960" y="3127248"/>
+            <a:off x="3200400" y="2902966"/>
             <a:ext cx="5715000" cy="347472"/>
           </a:xfrm>
           <a:prstGeom prst="rect">
@@ -22641,7 +20960,7 @@
         </p:nvSpPr>
         <p:spPr>
           <a:xfrm>
-            <a:off x="3246120" y="3547872"/>
+            <a:off x="3337560" y="3323590"/>
             <a:ext cx="5440680" cy="256032"/>
           </a:xfrm>
           <a:prstGeom prst="rect">
@@ -22677,7 +20996,7 @@
         </p:nvSpPr>
         <p:spPr>
           <a:xfrm>
-            <a:off x="3246120" y="3840480"/>
+            <a:off x="3337560" y="3616198"/>
             <a:ext cx="5440680" cy="256032"/>
           </a:xfrm>
           <a:prstGeom prst="rect">
@@ -22713,7 +21032,7 @@
         </p:nvSpPr>
         <p:spPr>
           <a:xfrm>
-            <a:off x="3246120" y="4133088"/>
+            <a:off x="3337560" y="3908806"/>
             <a:ext cx="5440680" cy="256032"/>
           </a:xfrm>
           <a:prstGeom prst="rect">
@@ -22749,7 +21068,7 @@
         </p:nvSpPr>
         <p:spPr>
           <a:xfrm>
-            <a:off x="3246120" y="4425696"/>
+            <a:off x="3337560" y="4201414"/>
             <a:ext cx="5440680" cy="256032"/>
           </a:xfrm>
           <a:prstGeom prst="rect">
@@ -22785,7 +21104,7 @@
         </p:nvSpPr>
         <p:spPr>
           <a:xfrm>
-            <a:off x="3246120" y="4718304"/>
+            <a:off x="3337560" y="4494022"/>
             <a:ext cx="5440680" cy="256032"/>
           </a:xfrm>
           <a:prstGeom prst="rect">
@@ -22821,7 +21140,7 @@
         </p:nvSpPr>
         <p:spPr>
           <a:xfrm>
-            <a:off x="320040" y="4754880"/>
+            <a:off x="364490" y="4914646"/>
             <a:ext cx="8503920" cy="274320"/>
           </a:xfrm>
           <a:prstGeom prst="rect">
@@ -24579,6 +22898,14 @@
             </a:pPr>
             <a:r>
               <a:rPr lang="en-US" sz="1050" b="1" dirty="0">
+                <a:solidFill>
+                  <a:srgbClr val="FFFFFF"/>
+                </a:solidFill>
+              </a:rPr>
+              <a:t>Next JS/</a:t>
+            </a:r>
+            <a:r>
+              <a:rPr lang="en-US" sz="1050" b="1" dirty="0" err="1">
                 <a:solidFill>
                   <a:srgbClr val="FFFFFF"/>
                 </a:solidFill>
